--- a/demo_site/files/slides/lecture24_concurrency3.pptx
+++ b/demo_site/files/slides/lecture24_concurrency3.pptx
@@ -3386,8 +3386,12 @@
               <a:rPr lang="en-US" dirty="0"/>
             </a:br>
             <a:r>
-              <a:rPr lang="en-US" dirty="0"/>
-              <a:t>Lecture 23: Concurrency 3 – </a:t>
+              <a:rPr lang="en-US"/>
+              <a:t>Lecture 24: </a:t>
+            </a:r>
+            <a:r>
+              <a:rPr lang="en-US" dirty="0"/>
+              <a:t>Concurrency 3 – </a:t>
             </a:r>
             <a:br>
               <a:rPr lang="en-US" dirty="0"/>
